--- a/statistics/statistics conclusions.pptx
+++ b/statistics/statistics conclusions.pptx
@@ -8,10 +8,9 @@
     <p:sldId id="256" r:id="rId2"/>
     <p:sldId id="262" r:id="rId3"/>
     <p:sldId id="257" r:id="rId4"/>
-    <p:sldId id="261" r:id="rId5"/>
-    <p:sldId id="258" r:id="rId6"/>
-    <p:sldId id="259" r:id="rId7"/>
-    <p:sldId id="260" r:id="rId8"/>
+    <p:sldId id="258" r:id="rId5"/>
+    <p:sldId id="259" r:id="rId6"/>
+    <p:sldId id="260" r:id="rId7"/>
   </p:sldIdLst>
   <p:sldSz cx="12192000" cy="6858000"/>
   <p:notesSz cx="6858000" cy="9144000"/>
@@ -265,7 +264,7 @@
           <a:p>
             <a:fld id="{8510F7D5-8CA1-4183-AAB7-9CF1CE1D8590}" type="datetimeFigureOut">
               <a:rPr lang="en-US" smtClean="0"/>
-              <a:t>11/21/2023</a:t>
+              <a:t>11/27/2023</a:t>
             </a:fld>
             <a:endParaRPr lang="en-US"/>
           </a:p>
@@ -463,7 +462,7 @@
           <a:p>
             <a:fld id="{8510F7D5-8CA1-4183-AAB7-9CF1CE1D8590}" type="datetimeFigureOut">
               <a:rPr lang="en-US" smtClean="0"/>
-              <a:t>11/21/2023</a:t>
+              <a:t>11/27/2023</a:t>
             </a:fld>
             <a:endParaRPr lang="en-US"/>
           </a:p>
@@ -671,7 +670,7 @@
           <a:p>
             <a:fld id="{8510F7D5-8CA1-4183-AAB7-9CF1CE1D8590}" type="datetimeFigureOut">
               <a:rPr lang="en-US" smtClean="0"/>
-              <a:t>11/21/2023</a:t>
+              <a:t>11/27/2023</a:t>
             </a:fld>
             <a:endParaRPr lang="en-US"/>
           </a:p>
@@ -869,7 +868,7 @@
           <a:p>
             <a:fld id="{8510F7D5-8CA1-4183-AAB7-9CF1CE1D8590}" type="datetimeFigureOut">
               <a:rPr lang="en-US" smtClean="0"/>
-              <a:t>11/21/2023</a:t>
+              <a:t>11/27/2023</a:t>
             </a:fld>
             <a:endParaRPr lang="en-US"/>
           </a:p>
@@ -1144,7 +1143,7 @@
           <a:p>
             <a:fld id="{8510F7D5-8CA1-4183-AAB7-9CF1CE1D8590}" type="datetimeFigureOut">
               <a:rPr lang="en-US" smtClean="0"/>
-              <a:t>11/21/2023</a:t>
+              <a:t>11/27/2023</a:t>
             </a:fld>
             <a:endParaRPr lang="en-US"/>
           </a:p>
@@ -1409,7 +1408,7 @@
           <a:p>
             <a:fld id="{8510F7D5-8CA1-4183-AAB7-9CF1CE1D8590}" type="datetimeFigureOut">
               <a:rPr lang="en-US" smtClean="0"/>
-              <a:t>11/21/2023</a:t>
+              <a:t>11/27/2023</a:t>
             </a:fld>
             <a:endParaRPr lang="en-US"/>
           </a:p>
@@ -1821,7 +1820,7 @@
           <a:p>
             <a:fld id="{8510F7D5-8CA1-4183-AAB7-9CF1CE1D8590}" type="datetimeFigureOut">
               <a:rPr lang="en-US" smtClean="0"/>
-              <a:t>11/21/2023</a:t>
+              <a:t>11/27/2023</a:t>
             </a:fld>
             <a:endParaRPr lang="en-US"/>
           </a:p>
@@ -1962,7 +1961,7 @@
           <a:p>
             <a:fld id="{8510F7D5-8CA1-4183-AAB7-9CF1CE1D8590}" type="datetimeFigureOut">
               <a:rPr lang="en-US" smtClean="0"/>
-              <a:t>11/21/2023</a:t>
+              <a:t>11/27/2023</a:t>
             </a:fld>
             <a:endParaRPr lang="en-US"/>
           </a:p>
@@ -2075,7 +2074,7 @@
           <a:p>
             <a:fld id="{8510F7D5-8CA1-4183-AAB7-9CF1CE1D8590}" type="datetimeFigureOut">
               <a:rPr lang="en-US" smtClean="0"/>
-              <a:t>11/21/2023</a:t>
+              <a:t>11/27/2023</a:t>
             </a:fld>
             <a:endParaRPr lang="en-US"/>
           </a:p>
@@ -2386,7 +2385,7 @@
           <a:p>
             <a:fld id="{8510F7D5-8CA1-4183-AAB7-9CF1CE1D8590}" type="datetimeFigureOut">
               <a:rPr lang="en-US" smtClean="0"/>
-              <a:t>11/21/2023</a:t>
+              <a:t>11/27/2023</a:t>
             </a:fld>
             <a:endParaRPr lang="en-US"/>
           </a:p>
@@ -2674,7 +2673,7 @@
           <a:p>
             <a:fld id="{8510F7D5-8CA1-4183-AAB7-9CF1CE1D8590}" type="datetimeFigureOut">
               <a:rPr lang="en-US" smtClean="0"/>
-              <a:t>11/21/2023</a:t>
+              <a:t>11/27/2023</a:t>
             </a:fld>
             <a:endParaRPr lang="en-US"/>
           </a:p>
@@ -2915,7 +2914,7 @@
           <a:p>
             <a:fld id="{8510F7D5-8CA1-4183-AAB7-9CF1CE1D8590}" type="datetimeFigureOut">
               <a:rPr lang="en-US" smtClean="0"/>
-              <a:t>11/21/2023</a:t>
+              <a:t>11/27/2023</a:t>
             </a:fld>
             <a:endParaRPr lang="en-US"/>
           </a:p>
@@ -4249,477 +4248,6 @@
 </file>
 
 <file path=ppt/slides/slide4.xml><?xml version="1.0" encoding="utf-8"?>
-<p:sld xmlns:a="http://schemas.openxmlformats.org/drawingml/2006/main" xmlns:r="http://schemas.openxmlformats.org/officeDocument/2006/relationships" xmlns:p="http://schemas.openxmlformats.org/presentationml/2006/main">
-  <p:cSld>
-    <p:bg>
-      <p:bgPr>
-        <a:solidFill>
-          <a:schemeClr val="bg1"/>
-        </a:solidFill>
-        <a:effectLst/>
-      </p:bgPr>
-    </p:bg>
-    <p:spTree>
-      <p:nvGrpSpPr>
-        <p:cNvPr id="1" name=""/>
-        <p:cNvGrpSpPr/>
-        <p:nvPr/>
-      </p:nvGrpSpPr>
-      <p:grpSpPr>
-        <a:xfrm>
-          <a:off x="0" y="0"/>
-          <a:ext cx="0" cy="0"/>
-          <a:chOff x="0" y="0"/>
-          <a:chExt cx="0" cy="0"/>
-        </a:xfrm>
-      </p:grpSpPr>
-      <p:sp useBgFill="1">
-        <p:nvSpPr>
-          <p:cNvPr id="17" name="Rectangle 16">
-            <a:extLst>
-              <a:ext uri="{FF2B5EF4-FFF2-40B4-BE49-F238E27FC236}">
-                <a16:creationId xmlns:a16="http://schemas.microsoft.com/office/drawing/2014/main" id="{2B97F24A-32CE-4C1C-A50D-3016B394DCFB}"/>
-              </a:ext>
-              <a:ext uri="{C183D7F6-B498-43B3-948B-1728B52AA6E4}">
-                <adec:decorative xmlns:adec="http://schemas.microsoft.com/office/drawing/2017/decorative" val="1"/>
-              </a:ext>
-            </a:extLst>
-          </p:cNvPr>
-          <p:cNvSpPr>
-            <a:spLocks noGrp="1" noRot="1" noChangeAspect="1" noMove="1" noResize="1" noEditPoints="1" noAdjustHandles="1" noChangeArrowheads="1" noChangeShapeType="1" noTextEdit="1"/>
-          </p:cNvSpPr>
-          <p:nvPr>
-            <p:extLst>
-              <p:ext uri="{386F3935-93C4-4BCD-93E2-E3B085C9AB24}">
-                <p16:designElem xmlns:p16="http://schemas.microsoft.com/office/powerpoint/2015/main" val="1"/>
-              </p:ext>
-            </p:extLst>
-          </p:nvPr>
-        </p:nvSpPr>
-        <p:spPr>
-          <a:xfrm>
-            <a:off x="0" y="0"/>
-            <a:ext cx="12192000" cy="6858000"/>
-          </a:xfrm>
-          <a:prstGeom prst="rect">
-            <a:avLst/>
-          </a:prstGeom>
-          <a:ln>
-            <a:noFill/>
-          </a:ln>
-        </p:spPr>
-        <p:style>
-          <a:lnRef idx="2">
-            <a:schemeClr val="accent1">
-              <a:shade val="50000"/>
-            </a:schemeClr>
-          </a:lnRef>
-          <a:fillRef idx="1">
-            <a:schemeClr val="accent1"/>
-          </a:fillRef>
-          <a:effectRef idx="0">
-            <a:schemeClr val="accent1"/>
-          </a:effectRef>
-          <a:fontRef idx="minor">
-            <a:schemeClr val="lt1"/>
-          </a:fontRef>
-        </p:style>
-        <p:txBody>
-          <a:bodyPr rtlCol="0" anchor="ctr"/>
-          <a:lstStyle/>
-          <a:p>
-            <a:pPr algn="ctr"/>
-            <a:endParaRPr lang="en-US"/>
-          </a:p>
-        </p:txBody>
-      </p:sp>
-      <p:sp>
-        <p:nvSpPr>
-          <p:cNvPr id="2" name="Title 1">
-            <a:extLst>
-              <a:ext uri="{FF2B5EF4-FFF2-40B4-BE49-F238E27FC236}">
-                <a16:creationId xmlns:a16="http://schemas.microsoft.com/office/drawing/2014/main" id="{83190E84-1F12-E20E-DFA8-9561053EAB56}"/>
-              </a:ext>
-            </a:extLst>
-          </p:cNvPr>
-          <p:cNvSpPr>
-            <a:spLocks noGrp="1"/>
-          </p:cNvSpPr>
-          <p:nvPr>
-            <p:ph type="title"/>
-          </p:nvPr>
-        </p:nvSpPr>
-        <p:spPr>
-          <a:xfrm>
-            <a:off x="630936" y="639520"/>
-            <a:ext cx="3429000" cy="1719072"/>
-          </a:xfrm>
-        </p:spPr>
-        <p:txBody>
-          <a:bodyPr anchor="b">
-            <a:normAutofit/>
-          </a:bodyPr>
-          <a:lstStyle/>
-          <a:p>
-            <a:r>
-              <a:rPr lang="en-US" sz="5400"/>
-              <a:t>Feature histogram</a:t>
-            </a:r>
-          </a:p>
-        </p:txBody>
-      </p:sp>
-      <p:sp>
-        <p:nvSpPr>
-          <p:cNvPr id="19" name="sketch line">
-            <a:extLst>
-              <a:ext uri="{FF2B5EF4-FFF2-40B4-BE49-F238E27FC236}">
-                <a16:creationId xmlns:a16="http://schemas.microsoft.com/office/drawing/2014/main" id="{CD8B4F24-440B-49E9-B85D-733523DC064B}"/>
-              </a:ext>
-              <a:ext uri="{C183D7F6-B498-43B3-948B-1728B52AA6E4}">
-                <adec:decorative xmlns:adec="http://schemas.microsoft.com/office/drawing/2017/decorative" val="1"/>
-              </a:ext>
-            </a:extLst>
-          </p:cNvPr>
-          <p:cNvSpPr>
-            <a:spLocks noGrp="1" noRot="1" noChangeAspect="1" noMove="1" noResize="1" noEditPoints="1" noAdjustHandles="1" noChangeArrowheads="1" noChangeShapeType="1" noTextEdit="1"/>
-          </p:cNvSpPr>
-          <p:nvPr>
-            <p:extLst>
-              <p:ext uri="{386F3935-93C4-4BCD-93E2-E3B085C9AB24}">
-                <p16:designElem xmlns:p16="http://schemas.microsoft.com/office/powerpoint/2015/main" val="1"/>
-              </p:ext>
-            </p:extLst>
-          </p:nvPr>
-        </p:nvSpPr>
-        <p:spPr>
-          <a:xfrm>
-            <a:off x="643278" y="2573756"/>
-            <a:ext cx="3255095" cy="18288"/>
-          </a:xfrm>
-          <a:custGeom>
-            <a:avLst/>
-            <a:gdLst>
-              <a:gd name="connsiteX0" fmla="*/ 0 w 3255095"/>
-              <a:gd name="connsiteY0" fmla="*/ 0 h 18288"/>
-              <a:gd name="connsiteX1" fmla="*/ 618468 w 3255095"/>
-              <a:gd name="connsiteY1" fmla="*/ 0 h 18288"/>
-              <a:gd name="connsiteX2" fmla="*/ 1269487 w 3255095"/>
-              <a:gd name="connsiteY2" fmla="*/ 0 h 18288"/>
-              <a:gd name="connsiteX3" fmla="*/ 1953057 w 3255095"/>
-              <a:gd name="connsiteY3" fmla="*/ 0 h 18288"/>
-              <a:gd name="connsiteX4" fmla="*/ 2636627 w 3255095"/>
-              <a:gd name="connsiteY4" fmla="*/ 0 h 18288"/>
-              <a:gd name="connsiteX5" fmla="*/ 3255095 w 3255095"/>
-              <a:gd name="connsiteY5" fmla="*/ 0 h 18288"/>
-              <a:gd name="connsiteX6" fmla="*/ 3255095 w 3255095"/>
-              <a:gd name="connsiteY6" fmla="*/ 18288 h 18288"/>
-              <a:gd name="connsiteX7" fmla="*/ 2538974 w 3255095"/>
-              <a:gd name="connsiteY7" fmla="*/ 18288 h 18288"/>
-              <a:gd name="connsiteX8" fmla="*/ 1822853 w 3255095"/>
-              <a:gd name="connsiteY8" fmla="*/ 18288 h 18288"/>
-              <a:gd name="connsiteX9" fmla="*/ 1171834 w 3255095"/>
-              <a:gd name="connsiteY9" fmla="*/ 18288 h 18288"/>
-              <a:gd name="connsiteX10" fmla="*/ 0 w 3255095"/>
-              <a:gd name="connsiteY10" fmla="*/ 18288 h 18288"/>
-              <a:gd name="connsiteX11" fmla="*/ 0 w 3255095"/>
-              <a:gd name="connsiteY11" fmla="*/ 0 h 18288"/>
-            </a:gdLst>
-            <a:ahLst/>
-            <a:cxnLst>
-              <a:cxn ang="0">
-                <a:pos x="connsiteX0" y="connsiteY0"/>
-              </a:cxn>
-              <a:cxn ang="0">
-                <a:pos x="connsiteX1" y="connsiteY1"/>
-              </a:cxn>
-              <a:cxn ang="0">
-                <a:pos x="connsiteX2" y="connsiteY2"/>
-              </a:cxn>
-              <a:cxn ang="0">
-                <a:pos x="connsiteX3" y="connsiteY3"/>
-              </a:cxn>
-              <a:cxn ang="0">
-                <a:pos x="connsiteX4" y="connsiteY4"/>
-              </a:cxn>
-              <a:cxn ang="0">
-                <a:pos x="connsiteX5" y="connsiteY5"/>
-              </a:cxn>
-              <a:cxn ang="0">
-                <a:pos x="connsiteX6" y="connsiteY6"/>
-              </a:cxn>
-              <a:cxn ang="0">
-                <a:pos x="connsiteX7" y="connsiteY7"/>
-              </a:cxn>
-              <a:cxn ang="0">
-                <a:pos x="connsiteX8" y="connsiteY8"/>
-              </a:cxn>
-              <a:cxn ang="0">
-                <a:pos x="connsiteX9" y="connsiteY9"/>
-              </a:cxn>
-              <a:cxn ang="0">
-                <a:pos x="connsiteX10" y="connsiteY10"/>
-              </a:cxn>
-              <a:cxn ang="0">
-                <a:pos x="connsiteX11" y="connsiteY11"/>
-              </a:cxn>
-            </a:cxnLst>
-            <a:rect l="l" t="t" r="r" b="b"/>
-            <a:pathLst>
-              <a:path w="3255095" h="18288" fill="none" extrusionOk="0">
-                <a:moveTo>
-                  <a:pt x="0" y="0"/>
-                </a:moveTo>
-                <a:cubicBezTo>
-                  <a:pt x="240201" y="-22123"/>
-                  <a:pt x="462021" y="-19623"/>
-                  <a:pt x="618468" y="0"/>
-                </a:cubicBezTo>
-                <a:cubicBezTo>
-                  <a:pt x="774915" y="19623"/>
-                  <a:pt x="974734" y="2035"/>
-                  <a:pt x="1269487" y="0"/>
-                </a:cubicBezTo>
-                <a:cubicBezTo>
-                  <a:pt x="1564240" y="-2035"/>
-                  <a:pt x="1733579" y="10639"/>
-                  <a:pt x="1953057" y="0"/>
-                </a:cubicBezTo>
-                <a:cubicBezTo>
-                  <a:pt x="2172535" y="-10639"/>
-                  <a:pt x="2453962" y="14018"/>
-                  <a:pt x="2636627" y="0"/>
-                </a:cubicBezTo>
-                <a:cubicBezTo>
-                  <a:pt x="2819292" y="-14018"/>
-                  <a:pt x="3121375" y="5399"/>
-                  <a:pt x="3255095" y="0"/>
-                </a:cubicBezTo>
-                <a:cubicBezTo>
-                  <a:pt x="3254386" y="8157"/>
-                  <a:pt x="3254682" y="12125"/>
-                  <a:pt x="3255095" y="18288"/>
-                </a:cubicBezTo>
-                <a:cubicBezTo>
-                  <a:pt x="3088545" y="23203"/>
-                  <a:pt x="2687475" y="7419"/>
-                  <a:pt x="2538974" y="18288"/>
-                </a:cubicBezTo>
-                <a:cubicBezTo>
-                  <a:pt x="2390473" y="29157"/>
-                  <a:pt x="2137381" y="-8959"/>
-                  <a:pt x="1822853" y="18288"/>
-                </a:cubicBezTo>
-                <a:cubicBezTo>
-                  <a:pt x="1508325" y="45535"/>
-                  <a:pt x="1466437" y="20385"/>
-                  <a:pt x="1171834" y="18288"/>
-                </a:cubicBezTo>
-                <a:cubicBezTo>
-                  <a:pt x="877231" y="16191"/>
-                  <a:pt x="561097" y="37643"/>
-                  <a:pt x="0" y="18288"/>
-                </a:cubicBezTo>
-                <a:cubicBezTo>
-                  <a:pt x="-46" y="12483"/>
-                  <a:pt x="-203" y="6491"/>
-                  <a:pt x="0" y="0"/>
-                </a:cubicBezTo>
-                <a:close/>
-              </a:path>
-              <a:path w="3255095" h="18288" stroke="0" extrusionOk="0">
-                <a:moveTo>
-                  <a:pt x="0" y="0"/>
-                </a:moveTo>
-                <a:cubicBezTo>
-                  <a:pt x="291965" y="19429"/>
-                  <a:pt x="363155" y="8568"/>
-                  <a:pt x="618468" y="0"/>
-                </a:cubicBezTo>
-                <a:cubicBezTo>
-                  <a:pt x="873781" y="-8568"/>
-                  <a:pt x="904459" y="-19505"/>
-                  <a:pt x="1171834" y="0"/>
-                </a:cubicBezTo>
-                <a:cubicBezTo>
-                  <a:pt x="1439209" y="19505"/>
-                  <a:pt x="1744369" y="9790"/>
-                  <a:pt x="1887955" y="0"/>
-                </a:cubicBezTo>
-                <a:cubicBezTo>
-                  <a:pt x="2031541" y="-9790"/>
-                  <a:pt x="2346378" y="21240"/>
-                  <a:pt x="2506423" y="0"/>
-                </a:cubicBezTo>
-                <a:cubicBezTo>
-                  <a:pt x="2666468" y="-21240"/>
-                  <a:pt x="2990257" y="30414"/>
-                  <a:pt x="3255095" y="0"/>
-                </a:cubicBezTo>
-                <a:cubicBezTo>
-                  <a:pt x="3254831" y="4493"/>
-                  <a:pt x="3255479" y="9472"/>
-                  <a:pt x="3255095" y="18288"/>
-                </a:cubicBezTo>
-                <a:cubicBezTo>
-                  <a:pt x="3120743" y="16690"/>
-                  <a:pt x="2759628" y="42462"/>
-                  <a:pt x="2604076" y="18288"/>
-                </a:cubicBezTo>
-                <a:cubicBezTo>
-                  <a:pt x="2448524" y="-5886"/>
-                  <a:pt x="2184336" y="19599"/>
-                  <a:pt x="1887955" y="18288"/>
-                </a:cubicBezTo>
-                <a:cubicBezTo>
-                  <a:pt x="1591574" y="16977"/>
-                  <a:pt x="1548845" y="6870"/>
-                  <a:pt x="1334589" y="18288"/>
-                </a:cubicBezTo>
-                <a:cubicBezTo>
-                  <a:pt x="1120333" y="29706"/>
-                  <a:pt x="996014" y="9662"/>
-                  <a:pt x="683570" y="18288"/>
-                </a:cubicBezTo>
-                <a:cubicBezTo>
-                  <a:pt x="371126" y="26914"/>
-                  <a:pt x="198687" y="16167"/>
-                  <a:pt x="0" y="18288"/>
-                </a:cubicBezTo>
-                <a:cubicBezTo>
-                  <a:pt x="843" y="9577"/>
-                  <a:pt x="371" y="6900"/>
-                  <a:pt x="0" y="0"/>
-                </a:cubicBezTo>
-                <a:close/>
-              </a:path>
-            </a:pathLst>
-          </a:custGeom>
-          <a:solidFill>
-            <a:schemeClr val="accent2"/>
-          </a:solidFill>
-          <a:ln w="38100" cap="rnd">
-            <a:solidFill>
-              <a:schemeClr val="accent2"/>
-            </a:solidFill>
-            <a:round/>
-            <a:extLst>
-              <a:ext uri="{C807C97D-BFC1-408E-A445-0C87EB9F89A2}">
-                <ask:lineSketchStyleProps xmlns:ask="http://schemas.microsoft.com/office/drawing/2018/sketchyshapes" sd="1219033472">
-                  <a:prstGeom prst="rect">
-                    <a:avLst/>
-                  </a:prstGeom>
-                  <ask:type>
-                    <ask:lineSketchFreehand/>
-                  </ask:type>
-                </ask:lineSketchStyleProps>
-              </a:ext>
-            </a:extLst>
-          </a:ln>
-        </p:spPr>
-        <p:style>
-          <a:lnRef idx="2">
-            <a:schemeClr val="accent1">
-              <a:shade val="50000"/>
-            </a:schemeClr>
-          </a:lnRef>
-          <a:fillRef idx="1">
-            <a:schemeClr val="accent1"/>
-          </a:fillRef>
-          <a:effectRef idx="0">
-            <a:schemeClr val="accent1"/>
-          </a:effectRef>
-          <a:fontRef idx="minor">
-            <a:schemeClr val="lt1"/>
-          </a:fontRef>
-        </p:style>
-        <p:txBody>
-          <a:bodyPr rtlCol="0" anchor="ctr"/>
-          <a:lstStyle/>
-          <a:p>
-            <a:pPr algn="ctr"/>
-            <a:endParaRPr lang="en-US"/>
-          </a:p>
-        </p:txBody>
-      </p:sp>
-      <p:sp>
-        <p:nvSpPr>
-          <p:cNvPr id="3" name="Content Placeholder 2">
-            <a:extLst>
-              <a:ext uri="{FF2B5EF4-FFF2-40B4-BE49-F238E27FC236}">
-                <a16:creationId xmlns:a16="http://schemas.microsoft.com/office/drawing/2014/main" id="{3F225963-A298-CB74-AB96-416776BF220C}"/>
-              </a:ext>
-            </a:extLst>
-          </p:cNvPr>
-          <p:cNvSpPr>
-            <a:spLocks noGrp="1"/>
-          </p:cNvSpPr>
-          <p:nvPr>
-            <p:ph idx="1"/>
-          </p:nvPr>
-        </p:nvSpPr>
-        <p:spPr>
-          <a:xfrm>
-            <a:off x="630936" y="2807208"/>
-            <a:ext cx="3429000" cy="3410712"/>
-          </a:xfrm>
-        </p:spPr>
-        <p:txBody>
-          <a:bodyPr anchor="t">
-            <a:normAutofit/>
-          </a:bodyPr>
-          <a:lstStyle/>
-          <a:p>
-            <a:endParaRPr lang="en-US" sz="2200"/>
-          </a:p>
-          <a:p>
-            <a:endParaRPr lang="en-US" sz="2200"/>
-          </a:p>
-        </p:txBody>
-      </p:sp>
-      <p:pic>
-        <p:nvPicPr>
-          <p:cNvPr id="5" name="Picture 4" descr="A screenshot of a graph&#10;&#10;Description automatically generated">
-            <a:extLst>
-              <a:ext uri="{FF2B5EF4-FFF2-40B4-BE49-F238E27FC236}">
-                <a16:creationId xmlns:a16="http://schemas.microsoft.com/office/drawing/2014/main" id="{8E9FDA9A-1B96-9ABD-38A4-4BAEBFAE97E5}"/>
-              </a:ext>
-            </a:extLst>
-          </p:cNvPr>
-          <p:cNvPicPr>
-            <a:picLocks noChangeAspect="1"/>
-          </p:cNvPicPr>
-          <p:nvPr/>
-        </p:nvPicPr>
-        <p:blipFill>
-          <a:blip r:embed="rId2"/>
-          <a:stretch>
-            <a:fillRect/>
-          </a:stretch>
-        </p:blipFill>
-        <p:spPr>
-          <a:xfrm>
-            <a:off x="4654296" y="1437542"/>
-            <a:ext cx="6903720" cy="3982915"/>
-          </a:xfrm>
-          <a:prstGeom prst="rect">
-            <a:avLst/>
-          </a:prstGeom>
-        </p:spPr>
-      </p:pic>
-    </p:spTree>
-    <p:extLst>
-      <p:ext uri="{BB962C8B-B14F-4D97-AF65-F5344CB8AC3E}">
-        <p14:creationId xmlns:p14="http://schemas.microsoft.com/office/powerpoint/2010/main" val="329662096"/>
-      </p:ext>
-    </p:extLst>
-  </p:cSld>
-  <p:clrMapOvr>
-    <a:masterClrMapping/>
-  </p:clrMapOvr>
-</p:sld>
-</file>
-
-<file path=ppt/slides/slide5.xml><?xml version="1.0" encoding="utf-8"?>
 <p:sld xmlns:a="http://schemas.openxmlformats.org/drawingml/2006/main" xmlns:r="http://schemas.openxmlformats.org/officeDocument/2006/relationships" xmlns:p="http://schemas.openxmlformats.org/presentationml/2006/main">
   <p:cSld>
     <p:bg>
@@ -5708,7 +5236,7 @@
 </p:sld>
 </file>
 
-<file path=ppt/slides/slide6.xml><?xml version="1.0" encoding="utf-8"?>
+<file path=ppt/slides/slide5.xml><?xml version="1.0" encoding="utf-8"?>
 <p:sld xmlns:a="http://schemas.openxmlformats.org/drawingml/2006/main" xmlns:r="http://schemas.openxmlformats.org/officeDocument/2006/relationships" xmlns:p="http://schemas.openxmlformats.org/presentationml/2006/main">
   <p:cSld>
     <p:bg>
@@ -6066,7 +5594,7 @@
 </p:sld>
 </file>
 
-<file path=ppt/slides/slide7.xml><?xml version="1.0" encoding="utf-8"?>
+<file path=ppt/slides/slide6.xml><?xml version="1.0" encoding="utf-8"?>
 <p:sld xmlns:a="http://schemas.openxmlformats.org/drawingml/2006/main" xmlns:r="http://schemas.openxmlformats.org/officeDocument/2006/relationships" xmlns:p="http://schemas.openxmlformats.org/presentationml/2006/main">
   <p:cSld>
     <p:bg>

--- a/statistics/statistics conclusions.pptx
+++ b/statistics/statistics conclusions.pptx
@@ -5,12 +5,11 @@
     <p:sldMasterId id="2147483648" r:id="rId1"/>
   </p:sldMasterIdLst>
   <p:sldIdLst>
-    <p:sldId id="256" r:id="rId2"/>
+    <p:sldId id="263" r:id="rId2"/>
     <p:sldId id="262" r:id="rId3"/>
     <p:sldId id="257" r:id="rId4"/>
     <p:sldId id="258" r:id="rId5"/>
     <p:sldId id="259" r:id="rId6"/>
-    <p:sldId id="260" r:id="rId7"/>
   </p:sldIdLst>
   <p:sldSz cx="12192000" cy="6858000"/>
   <p:notesSz cx="6858000" cy="9144000"/>
@@ -264,7 +263,7 @@
           <a:p>
             <a:fld id="{8510F7D5-8CA1-4183-AAB7-9CF1CE1D8590}" type="datetimeFigureOut">
               <a:rPr lang="en-US" smtClean="0"/>
-              <a:t>11/27/2023</a:t>
+              <a:t>1/9/2024</a:t>
             </a:fld>
             <a:endParaRPr lang="en-US"/>
           </a:p>
@@ -462,7 +461,7 @@
           <a:p>
             <a:fld id="{8510F7D5-8CA1-4183-AAB7-9CF1CE1D8590}" type="datetimeFigureOut">
               <a:rPr lang="en-US" smtClean="0"/>
-              <a:t>11/27/2023</a:t>
+              <a:t>1/9/2024</a:t>
             </a:fld>
             <a:endParaRPr lang="en-US"/>
           </a:p>
@@ -670,7 +669,7 @@
           <a:p>
             <a:fld id="{8510F7D5-8CA1-4183-AAB7-9CF1CE1D8590}" type="datetimeFigureOut">
               <a:rPr lang="en-US" smtClean="0"/>
-              <a:t>11/27/2023</a:t>
+              <a:t>1/9/2024</a:t>
             </a:fld>
             <a:endParaRPr lang="en-US"/>
           </a:p>
@@ -868,7 +867,7 @@
           <a:p>
             <a:fld id="{8510F7D5-8CA1-4183-AAB7-9CF1CE1D8590}" type="datetimeFigureOut">
               <a:rPr lang="en-US" smtClean="0"/>
-              <a:t>11/27/2023</a:t>
+              <a:t>1/9/2024</a:t>
             </a:fld>
             <a:endParaRPr lang="en-US"/>
           </a:p>
@@ -1143,7 +1142,7 @@
           <a:p>
             <a:fld id="{8510F7D5-8CA1-4183-AAB7-9CF1CE1D8590}" type="datetimeFigureOut">
               <a:rPr lang="en-US" smtClean="0"/>
-              <a:t>11/27/2023</a:t>
+              <a:t>1/9/2024</a:t>
             </a:fld>
             <a:endParaRPr lang="en-US"/>
           </a:p>
@@ -1408,7 +1407,7 @@
           <a:p>
             <a:fld id="{8510F7D5-8CA1-4183-AAB7-9CF1CE1D8590}" type="datetimeFigureOut">
               <a:rPr lang="en-US" smtClean="0"/>
-              <a:t>11/27/2023</a:t>
+              <a:t>1/9/2024</a:t>
             </a:fld>
             <a:endParaRPr lang="en-US"/>
           </a:p>
@@ -1820,7 +1819,7 @@
           <a:p>
             <a:fld id="{8510F7D5-8CA1-4183-AAB7-9CF1CE1D8590}" type="datetimeFigureOut">
               <a:rPr lang="en-US" smtClean="0"/>
-              <a:t>11/27/2023</a:t>
+              <a:t>1/9/2024</a:t>
             </a:fld>
             <a:endParaRPr lang="en-US"/>
           </a:p>
@@ -1961,7 +1960,7 @@
           <a:p>
             <a:fld id="{8510F7D5-8CA1-4183-AAB7-9CF1CE1D8590}" type="datetimeFigureOut">
               <a:rPr lang="en-US" smtClean="0"/>
-              <a:t>11/27/2023</a:t>
+              <a:t>1/9/2024</a:t>
             </a:fld>
             <a:endParaRPr lang="en-US"/>
           </a:p>
@@ -2074,7 +2073,7 @@
           <a:p>
             <a:fld id="{8510F7D5-8CA1-4183-AAB7-9CF1CE1D8590}" type="datetimeFigureOut">
               <a:rPr lang="en-US" smtClean="0"/>
-              <a:t>11/27/2023</a:t>
+              <a:t>1/9/2024</a:t>
             </a:fld>
             <a:endParaRPr lang="en-US"/>
           </a:p>
@@ -2385,7 +2384,7 @@
           <a:p>
             <a:fld id="{8510F7D5-8CA1-4183-AAB7-9CF1CE1D8590}" type="datetimeFigureOut">
               <a:rPr lang="en-US" smtClean="0"/>
-              <a:t>11/27/2023</a:t>
+              <a:t>1/9/2024</a:t>
             </a:fld>
             <a:endParaRPr lang="en-US"/>
           </a:p>
@@ -2673,7 +2672,7 @@
           <a:p>
             <a:fld id="{8510F7D5-8CA1-4183-AAB7-9CF1CE1D8590}" type="datetimeFigureOut">
               <a:rPr lang="en-US" smtClean="0"/>
-              <a:t>11/27/2023</a:t>
+              <a:t>1/9/2024</a:t>
             </a:fld>
             <a:endParaRPr lang="en-US"/>
           </a:p>
@@ -2914,7 +2913,7 @@
           <a:p>
             <a:fld id="{8510F7D5-8CA1-4183-AAB7-9CF1CE1D8590}" type="datetimeFigureOut">
               <a:rPr lang="en-US" smtClean="0"/>
-              <a:t>11/27/2023</a:t>
+              <a:t>1/9/2024</a:t>
             </a:fld>
             <a:endParaRPr lang="en-US"/>
           </a:p>
@@ -3552,81 +3551,115 @@
           <a:p>
             <a:pPr algn="l"/>
             <a:r>
-              <a:rPr lang="en-US" dirty="0">
+              <a:rPr lang="en-US" sz="2000" dirty="0">
                 <a:latin typeface="Calibri (Body)"/>
               </a:rPr>
-              <a:t>Spearman correlation was used on 3 target columns </a:t>
-            </a:r>
-            <a:r>
-              <a:rPr lang="en-US" b="0" dirty="0">
+              <a:t>Spearman correlation was used on 4 target columns </a:t>
+            </a:r>
+            <a:r>
+              <a:rPr lang="en-US" sz="2000" b="0" dirty="0">
                 <a:effectLst/>
                 <a:latin typeface="Calibri (Body)"/>
               </a:rPr>
               <a:t>'city </a:t>
             </a:r>
             <a:r>
-              <a:rPr lang="en-US" b="0" dirty="0" err="1">
+              <a:rPr lang="en-US" sz="2000" b="0" dirty="0" err="1">
                 <a:effectLst/>
                 <a:latin typeface="Calibri (Body)"/>
               </a:rPr>
               <a:t>rank','Distance</a:t>
             </a:r>
             <a:r>
-              <a:rPr lang="en-US" b="0" dirty="0">
+              <a:rPr lang="en-US" sz="2000" b="0" dirty="0">
                 <a:effectLst/>
                 <a:latin typeface="Calibri (Body)"/>
               </a:rPr>
               <a:t> from </a:t>
             </a:r>
             <a:r>
-              <a:rPr lang="en-US" b="0" dirty="0" err="1">
+              <a:rPr lang="en-US" sz="2000" b="0" dirty="0" err="1">
                 <a:effectLst/>
                 <a:latin typeface="Calibri (Body)"/>
               </a:rPr>
               <a:t>gaza</a:t>
             </a:r>
             <a:r>
-              <a:rPr lang="en-US" b="0" dirty="0">
+              <a:rPr lang="en-US" sz="2000" b="0" dirty="0">
                 <a:effectLst/>
                 <a:latin typeface="Calibri (Body)"/>
               </a:rPr>
               <a:t>','</a:t>
             </a:r>
             <a:r>
-              <a:rPr lang="en-US" b="0" dirty="0" err="1">
+              <a:rPr lang="en-US" sz="2000" b="0" dirty="0" err="1">
                 <a:effectLst/>
                 <a:latin typeface="Calibri (Body)"/>
               </a:rPr>
               <a:t>hifa_port_dis</a:t>
             </a:r>
             <a:r>
-              <a:rPr lang="en-US" b="0" dirty="0">
+              <a:rPr lang="en-US" sz="2000" b="0" dirty="0">
                 <a:effectLst/>
                 <a:latin typeface="Calibri (Body)"/>
               </a:rPr>
-              <a:t>’ </a:t>
-            </a:r>
-            <a:endParaRPr lang="en-US" dirty="0">
-              <a:latin typeface="Calibri (Body)"/>
-            </a:endParaRPr>
-          </a:p>
-          <a:p>
-            <a:pPr algn="l"/>
-            <a:r>
-              <a:rPr lang="en-US" b="0" dirty="0">
+              <a:t>’ and ‘</a:t>
+            </a:r>
+            <a:r>
+              <a:rPr lang="en-US" sz="2000" b="0" dirty="0" err="1">
                 <a:effectLst/>
                 <a:latin typeface="Calibri (Body)"/>
               </a:rPr>
-              <a:t>All 3 tests outputs gave a p-value of 0 (rounded </a:t>
-            </a:r>
-            <a:r>
-              <a:rPr lang="en-US" dirty="0">
+              <a:t>distance_to_ashdod_port</a:t>
+            </a:r>
+            <a:r>
+              <a:rPr lang="en-US" sz="2000" b="0" dirty="0">
+                <a:effectLst/>
+                <a:latin typeface="Calibri (Body)"/>
+              </a:rPr>
+              <a:t> ’ . </a:t>
+            </a:r>
+          </a:p>
+          <a:p>
+            <a:pPr algn="l"/>
+            <a:r>
+              <a:rPr lang="en-US" sz="2000" b="0" dirty="0">
+                <a:effectLst/>
+                <a:latin typeface="Calibri (Body)"/>
+              </a:rPr>
+              <a:t>The data was taken from 2016 onwards, and Eilat's beaches were also removed.</a:t>
+            </a:r>
+          </a:p>
+          <a:p>
+            <a:pPr algn="l"/>
+            <a:r>
+              <a:rPr lang="en-US" sz="2000" b="0" dirty="0">
+                <a:effectLst/>
+                <a:latin typeface="Calibri (Body)"/>
+              </a:rPr>
+              <a:t>All </a:t>
+            </a:r>
+            <a:r>
+              <a:rPr lang="en-US" sz="2000" dirty="0">
+                <a:latin typeface="Calibri (Body)"/>
+              </a:rPr>
+              <a:t>4</a:t>
+            </a:r>
+            <a:r>
+              <a:rPr lang="en-US" sz="2000" b="0" dirty="0">
+                <a:effectLst/>
+                <a:latin typeface="Calibri (Body)"/>
+              </a:rPr>
+              <a:t> tests outputs gave a p-value of 0 (rounded </a:t>
+            </a:r>
+            <a:r>
+              <a:rPr lang="en-US" sz="2000" dirty="0">
                 <a:latin typeface="Calibri (Body)"/>
               </a:rPr>
               <a:t>up to the 5th decimal point</a:t>
             </a:r>
             <a:r>
-              <a:rPr lang="en-US" b="0" dirty="0">
+              <a:rPr lang="en-US" sz="2000" b="0" dirty="0">
                 <a:effectLst/>
                 <a:latin typeface="Calibri (Body)"/>
               </a:rPr>
@@ -3636,12 +3669,12 @@
           <a:p>
             <a:pPr algn="l"/>
             <a:r>
-              <a:rPr lang="en-US" dirty="0">
+              <a:rPr lang="en-US" sz="2000" dirty="0">
                 <a:latin typeface="Calibri (Body)"/>
               </a:rPr>
-              <a:t>Corresponding rho’s: 0.03, -0.05, 0.1. </a:t>
-            </a:r>
-            <a:endParaRPr lang="en-US" b="0" dirty="0">
+              <a:t>Corresponding rho’s: -0.044, 0.077, -0.135, 0.11. </a:t>
+            </a:r>
+            <a:endParaRPr lang="en-US" sz="2000" b="0" dirty="0">
               <a:effectLst/>
               <a:latin typeface="Calibri (Body)"/>
             </a:endParaRPr>
@@ -3651,7 +3684,7 @@
     </p:spTree>
     <p:extLst>
       <p:ext uri="{BB962C8B-B14F-4D97-AF65-F5344CB8AC3E}">
-        <p14:creationId xmlns:p14="http://schemas.microsoft.com/office/powerpoint/2010/main" val="1440537331"/>
+        <p14:creationId xmlns:p14="http://schemas.microsoft.com/office/powerpoint/2010/main" val="1173607436"/>
       </p:ext>
     </p:extLst>
   </p:cSld>
@@ -3884,7 +3917,7 @@
         <p:spPr>
           <a:xfrm>
             <a:off x="5530645" y="1047135"/>
-            <a:ext cx="5235678" cy="1754326"/>
+            <a:ext cx="5235678" cy="5016758"/>
           </a:xfrm>
           <a:prstGeom prst="rect">
             <a:avLst/>
@@ -3898,23 +3931,74 @@
           <a:lstStyle/>
           <a:p>
             <a:r>
-              <a:rPr lang="en-US" dirty="0"/>
-              <a:t>Further correlations were tested whilst taking into consideration the date time, each time in a different scenario: wintertime, summer vacation and Eilat area.</a:t>
-            </a:r>
-          </a:p>
-          <a:p>
-            <a:endParaRPr lang="en-US" dirty="0"/>
-          </a:p>
-          <a:p>
-            <a:r>
-              <a:rPr lang="en-US" dirty="0"/>
-              <a:t>All 3 tests resulted in a p-value of approximately 0.</a:t>
-            </a:r>
-          </a:p>
-          <a:p>
-            <a:r>
-              <a:rPr lang="en-US" dirty="0"/>
-              <a:t>Corresponding rho’s: 0.10,0.06,0.18</a:t>
+              <a:rPr lang="en-US" sz="2000" dirty="0"/>
+              <a:t>Further correlations were tested whilst taking into consideration the date time, each time in a different scenario: </a:t>
+            </a:r>
+            <a:r>
+              <a:rPr lang="en-US" sz="2000" b="1" dirty="0"/>
+              <a:t>winter-time </a:t>
+            </a:r>
+            <a:r>
+              <a:rPr lang="en-US" sz="2000" dirty="0"/>
+              <a:t>and </a:t>
+            </a:r>
+            <a:r>
+              <a:rPr lang="en-US" sz="2000" b="1" dirty="0"/>
+              <a:t>summer</a:t>
+            </a:r>
+            <a:r>
+              <a:rPr lang="en-US" sz="2000" dirty="0"/>
+              <a:t> </a:t>
+            </a:r>
+            <a:r>
+              <a:rPr lang="en-US" sz="2000" b="1" dirty="0"/>
+              <a:t>vacation</a:t>
+            </a:r>
+            <a:r>
+              <a:rPr lang="en-US" sz="2000" dirty="0"/>
+              <a:t>.</a:t>
+            </a:r>
+          </a:p>
+          <a:p>
+            <a:r>
+              <a:rPr lang="en-US" sz="2000" dirty="0"/>
+              <a:t>Once again, the data was taken from years 2016 and above. Here Eilat’s coasts were separated from the rest, so the correlation were checked twice.</a:t>
+            </a:r>
+          </a:p>
+          <a:p>
+            <a:endParaRPr lang="en-US" sz="2000" dirty="0"/>
+          </a:p>
+          <a:p>
+            <a:r>
+              <a:rPr lang="en-US" sz="2000" dirty="0"/>
+              <a:t> </a:t>
+            </a:r>
+          </a:p>
+          <a:p>
+            <a:r>
+              <a:rPr lang="en-US" sz="2000" dirty="0"/>
+              <a:t>All tests resulted in a p-value of approximately 0 in both cases.</a:t>
+            </a:r>
+          </a:p>
+          <a:p>
+            <a:endParaRPr lang="en-US" sz="2000" dirty="0"/>
+          </a:p>
+          <a:p>
+            <a:r>
+              <a:rPr lang="en-US" sz="2000" dirty="0"/>
+              <a:t>Corresponding rho’s:</a:t>
+            </a:r>
+          </a:p>
+          <a:p>
+            <a:r>
+              <a:rPr lang="en-US" sz="2000" dirty="0"/>
+              <a:t>General coasts: -0.199, -0.193</a:t>
+            </a:r>
+          </a:p>
+          <a:p>
+            <a:r>
+              <a:rPr lang="en-US" sz="2000" dirty="0"/>
+              <a:t>Eilat coasts: 0.551, -0.011</a:t>
             </a:r>
           </a:p>
         </p:txBody>
@@ -4272,12 +4356,12 @@
           <a:chExt cx="0" cy="0"/>
         </a:xfrm>
       </p:grpSpPr>
-      <p:sp>
-        <p:nvSpPr>
-          <p:cNvPr id="8" name="Rectangle 7">
-            <a:extLst>
-              <a:ext uri="{FF2B5EF4-FFF2-40B4-BE49-F238E27FC236}">
-                <a16:creationId xmlns:a16="http://schemas.microsoft.com/office/drawing/2014/main" id="{70DFC902-7D23-471A-B557-B6B6917D7A0D}"/>
+      <p:sp useBgFill="1">
+        <p:nvSpPr>
+          <p:cNvPr id="31" name="Rectangle 30">
+            <a:extLst>
+              <a:ext uri="{FF2B5EF4-FFF2-40B4-BE49-F238E27FC236}">
+                <a16:creationId xmlns:a16="http://schemas.microsoft.com/office/drawing/2014/main" id="{1A95671B-3CC6-4792-9114-B74FAEA224E6}"/>
               </a:ext>
               <a:ext uri="{C183D7F6-B498-43B3-948B-1728B52AA6E4}">
                 <adec:decorative xmlns:adec="http://schemas.microsoft.com/office/drawing/2017/decorative" val="1"/>
@@ -4297,18 +4381,12 @@
         </p:nvSpPr>
         <p:spPr>
           <a:xfrm>
-            <a:off x="10" y="-5705"/>
-            <a:ext cx="12191990" cy="1694346"/>
+            <a:off x="0" y="0"/>
+            <a:ext cx="12188952" cy="6858000"/>
           </a:xfrm>
           <a:prstGeom prst="rect">
             <a:avLst/>
           </a:prstGeom>
-          <a:solidFill>
-            <a:schemeClr val="tx1">
-              <a:lumMod val="85000"/>
-              <a:lumOff val="15000"/>
-            </a:schemeClr>
-          </a:solidFill>
           <a:ln>
             <a:noFill/>
           </a:ln>
@@ -4356,22 +4434,19 @@
         </p:nvSpPr>
         <p:spPr>
           <a:xfrm>
-            <a:off x="1156851" y="637762"/>
-            <a:ext cx="9888496" cy="900131"/>
+            <a:off x="1008184" y="174032"/>
+            <a:ext cx="10175631" cy="1111843"/>
           </a:xfrm>
         </p:spPr>
         <p:txBody>
-          <a:bodyPr anchor="t">
+          <a:bodyPr anchor="ctr">
             <a:normAutofit/>
           </a:bodyPr>
           <a:lstStyle/>
           <a:p>
-            <a:r>
-              <a:rPr lang="en-US" sz="4000">
-                <a:solidFill>
-                  <a:schemeClr val="bg1"/>
-                </a:solidFill>
-              </a:rPr>
+            <a:pPr algn="ctr"/>
+            <a:r>
+              <a:rPr lang="en-US" sz="4000"/>
               <a:t>Results</a:t>
             </a:r>
           </a:p>
@@ -4379,162 +4454,35 @@
       </p:sp>
       <p:sp>
         <p:nvSpPr>
-          <p:cNvPr id="10" name="Rectangle 9">
-            <a:extLst>
-              <a:ext uri="{FF2B5EF4-FFF2-40B4-BE49-F238E27FC236}">
-                <a16:creationId xmlns:a16="http://schemas.microsoft.com/office/drawing/2014/main" id="{A55D5633-D557-4DCA-982C-FF36EB7A1C00}"/>
-              </a:ext>
-              <a:ext uri="{C183D7F6-B498-43B3-948B-1728B52AA6E4}">
-                <adec:decorative xmlns:adec="http://schemas.microsoft.com/office/drawing/2017/decorative" val="1"/>
-              </a:ext>
-            </a:extLst>
-          </p:cNvPr>
-          <p:cNvSpPr>
-            <a:spLocks noGrp="1" noRot="1" noChangeAspect="1" noMove="1" noResize="1" noEditPoints="1" noAdjustHandles="1" noChangeArrowheads="1" noChangeShapeType="1" noTextEdit="1"/>
-          </p:cNvSpPr>
-          <p:nvPr>
-            <p:extLst>
-              <p:ext uri="{386F3935-93C4-4BCD-93E2-E3B085C9AB24}">
-                <p16:designElem xmlns:p16="http://schemas.microsoft.com/office/powerpoint/2015/main" val="1"/>
-              </p:ext>
-            </p:extLst>
+          <p:cNvPr id="3" name="Content Placeholder 2">
+            <a:extLst>
+              <a:ext uri="{FF2B5EF4-FFF2-40B4-BE49-F238E27FC236}">
+                <a16:creationId xmlns:a16="http://schemas.microsoft.com/office/drawing/2014/main" id="{16082CAD-7626-24C9-8F32-2E374E7E4204}"/>
+              </a:ext>
+            </a:extLst>
+          </p:cNvPr>
+          <p:cNvSpPr>
+            <a:spLocks noGrp="1"/>
+          </p:cNvSpPr>
+          <p:nvPr>
+            <p:ph idx="1"/>
           </p:nvPr>
         </p:nvSpPr>
         <p:spPr>
           <a:xfrm>
-            <a:off x="0" y="1688641"/>
-            <a:ext cx="12191990" cy="5169359"/>
-          </a:xfrm>
-          <a:prstGeom prst="rect">
-            <a:avLst/>
-          </a:prstGeom>
-          <a:solidFill>
-            <a:schemeClr val="bg1">
-              <a:lumMod val="95000"/>
-            </a:schemeClr>
-          </a:solidFill>
-          <a:ln>
-            <a:noFill/>
-          </a:ln>
-        </p:spPr>
-        <p:style>
-          <a:lnRef idx="2">
-            <a:schemeClr val="accent1">
-              <a:shade val="50000"/>
-            </a:schemeClr>
-          </a:lnRef>
-          <a:fillRef idx="1">
-            <a:schemeClr val="accent1"/>
-          </a:fillRef>
-          <a:effectRef idx="0">
-            <a:schemeClr val="accent1"/>
-          </a:effectRef>
-          <a:fontRef idx="minor">
-            <a:schemeClr val="lt1"/>
-          </a:fontRef>
-        </p:style>
-        <p:txBody>
-          <a:bodyPr rtlCol="0" anchor="ctr"/>
-          <a:lstStyle/>
-          <a:p>
-            <a:pPr algn="ctr"/>
-            <a:endParaRPr lang="en-US"/>
-          </a:p>
-        </p:txBody>
-      </p:sp>
-      <p:sp>
-        <p:nvSpPr>
-          <p:cNvPr id="12" name="Rectangle 11">
-            <a:extLst>
-              <a:ext uri="{FF2B5EF4-FFF2-40B4-BE49-F238E27FC236}">
-                <a16:creationId xmlns:a16="http://schemas.microsoft.com/office/drawing/2014/main" id="{450D3AD2-FA80-415F-A9CE-54D884561CD7}"/>
-              </a:ext>
-              <a:ext uri="{C183D7F6-B498-43B3-948B-1728B52AA6E4}">
-                <adec:decorative xmlns:adec="http://schemas.microsoft.com/office/drawing/2017/decorative" val="1"/>
-              </a:ext>
-            </a:extLst>
-          </p:cNvPr>
-          <p:cNvSpPr>
-            <a:spLocks noGrp="1" noRot="1" noChangeAspect="1" noMove="1" noResize="1" noEditPoints="1" noAdjustHandles="1" noChangeArrowheads="1" noChangeShapeType="1" noTextEdit="1"/>
-          </p:cNvSpPr>
-          <p:nvPr>
-            <p:extLst>
-              <p:ext uri="{386F3935-93C4-4BCD-93E2-E3B085C9AB24}">
-                <p16:designElem xmlns:p16="http://schemas.microsoft.com/office/powerpoint/2015/main" val="1"/>
-              </p:ext>
-            </p:extLst>
-          </p:nvPr>
-        </p:nvSpPr>
-        <p:spPr>
-          <a:xfrm>
-            <a:off x="1156851" y="2010758"/>
-            <a:ext cx="457190" cy="45719"/>
-          </a:xfrm>
-          <a:prstGeom prst="rect">
-            <a:avLst/>
-          </a:prstGeom>
-          <a:solidFill>
-            <a:schemeClr val="tx1"/>
-          </a:solidFill>
-          <a:ln>
-            <a:noFill/>
-          </a:ln>
-        </p:spPr>
-        <p:style>
-          <a:lnRef idx="2">
-            <a:schemeClr val="accent1">
-              <a:shade val="50000"/>
-            </a:schemeClr>
-          </a:lnRef>
-          <a:fillRef idx="1">
-            <a:schemeClr val="accent1"/>
-          </a:fillRef>
-          <a:effectRef idx="0">
-            <a:schemeClr val="accent1"/>
-          </a:effectRef>
-          <a:fontRef idx="minor">
-            <a:schemeClr val="lt1"/>
-          </a:fontRef>
-        </p:style>
-        <p:txBody>
-          <a:bodyPr rtlCol="0" anchor="ctr"/>
-          <a:lstStyle/>
-          <a:p>
-            <a:pPr algn="ctr"/>
-            <a:endParaRPr lang="en-US"/>
-          </a:p>
-        </p:txBody>
-      </p:sp>
-      <p:sp>
-        <p:nvSpPr>
-          <p:cNvPr id="3" name="Content Placeholder 2">
-            <a:extLst>
-              <a:ext uri="{FF2B5EF4-FFF2-40B4-BE49-F238E27FC236}">
-                <a16:creationId xmlns:a16="http://schemas.microsoft.com/office/drawing/2014/main" id="{16082CAD-7626-24C9-8F32-2E374E7E4204}"/>
-              </a:ext>
-            </a:extLst>
-          </p:cNvPr>
-          <p:cNvSpPr>
-            <a:spLocks noGrp="1"/>
-          </p:cNvSpPr>
-          <p:nvPr>
-            <p:ph idx="1"/>
-          </p:nvPr>
-        </p:nvSpPr>
-        <p:spPr>
-          <a:xfrm>
-            <a:off x="1155548" y="2217343"/>
-            <a:ext cx="9880893" cy="3959619"/>
+            <a:off x="1008184" y="1459907"/>
+            <a:ext cx="10175630" cy="767904"/>
           </a:xfrm>
         </p:spPr>
         <p:txBody>
-          <a:bodyPr>
+          <a:bodyPr anchor="ctr">
             <a:normAutofit/>
           </a:bodyPr>
           <a:lstStyle/>
           <a:p>
-            <a:r>
-              <a:rPr lang="en-US" sz="2400" dirty="0"/>
+            <a:pPr algn="ctr"/>
+            <a:r>
+              <a:rPr lang="en-US" sz="2000" dirty="0"/>
               <a:t> key columns were tested against the target, such as ‘bathing season’ , winter’ ,‘military’. </a:t>
             </a:r>
           </a:p>
@@ -4555,14 +4503,14 @@
           <p:nvPr>
             <p:extLst>
               <p:ext uri="{D42A27DB-BD31-4B8C-83A1-F6EECF244321}">
-                <p14:modId xmlns:p14="http://schemas.microsoft.com/office/powerpoint/2010/main" val="2142913899"/>
+                <p14:modId xmlns:p14="http://schemas.microsoft.com/office/powerpoint/2010/main" val="1800661392"/>
               </p:ext>
             </p:extLst>
           </p:nvPr>
         </p:nvGraphicFramePr>
         <p:xfrm>
-          <a:off x="368700" y="3215322"/>
-          <a:ext cx="11454587" cy="2590800"/>
+          <a:off x="1702343" y="2405149"/>
+          <a:ext cx="8781218" cy="3899399"/>
         </p:xfrm>
         <a:graphic>
           <a:graphicData uri="http://schemas.openxmlformats.org/drawingml/2006/table">
@@ -4571,28 +4519,28 @@
                 <a:tableStyleId>{5C22544A-7EE6-4342-B048-85BDC9FD1C3A}</a:tableStyleId>
               </a:tblPr>
               <a:tblGrid>
-                <a:gridCol w="2375019">
+                <a:gridCol w="1802153">
                   <a:extLst>
                     <a:ext uri="{9D8B030D-6E8A-4147-A177-3AD203B41FA5}">
                       <a16:colId xmlns:a16="http://schemas.microsoft.com/office/drawing/2014/main" val="117742938"/>
                     </a:ext>
                   </a:extLst>
                 </a:gridCol>
-                <a:gridCol w="3482578">
+                <a:gridCol w="2713694">
                   <a:extLst>
                     <a:ext uri="{9D8B030D-6E8A-4147-A177-3AD203B41FA5}">
                       <a16:colId xmlns:a16="http://schemas.microsoft.com/office/drawing/2014/main" val="3107128215"/>
                     </a:ext>
                   </a:extLst>
                 </a:gridCol>
-                <a:gridCol w="4015619">
+                <a:gridCol w="3065434">
                   <a:extLst>
                     <a:ext uri="{9D8B030D-6E8A-4147-A177-3AD203B41FA5}">
                       <a16:colId xmlns:a16="http://schemas.microsoft.com/office/drawing/2014/main" val="4113882395"/>
                     </a:ext>
                   </a:extLst>
                 </a:gridCol>
-                <a:gridCol w="1581371">
+                <a:gridCol w="1199937">
                   <a:extLst>
                     <a:ext uri="{9D8B030D-6E8A-4147-A177-3AD203B41FA5}">
                       <a16:colId xmlns:a16="http://schemas.microsoft.com/office/drawing/2014/main" val="3017124678"/>
@@ -4600,19 +4548,19 @@
                   </a:extLst>
                 </a:gridCol>
               </a:tblGrid>
-              <a:tr h="189605">
+              <a:tr h="305291">
                 <a:tc>
                   <a:txBody>
                     <a:bodyPr/>
                     <a:lstStyle/>
                     <a:p>
                       <a:r>
-                        <a:rPr lang="en-US" dirty="0"/>
+                        <a:rPr lang="en-US" sz="1400"/>
                         <a:t>Feature name</a:t>
                       </a:r>
                     </a:p>
                   </a:txBody>
-                  <a:tcPr/>
+                  <a:tcPr marL="69384" marR="69384" marT="34692" marB="34692"/>
                 </a:tc>
                 <a:tc>
                   <a:txBody>
@@ -4637,12 +4585,12 @@
                         <a:defRPr/>
                       </a:pPr>
                       <a:r>
-                        <a:rPr lang="en-US" dirty="0"/>
+                        <a:rPr lang="en-US" sz="1400"/>
                         <a:t>Positive group values</a:t>
                       </a:r>
                     </a:p>
                   </a:txBody>
-                  <a:tcPr/>
+                  <a:tcPr marL="69384" marR="69384" marT="34692" marB="34692"/>
                 </a:tc>
                 <a:tc>
                   <a:txBody>
@@ -4667,12 +4615,12 @@
                         <a:defRPr/>
                       </a:pPr>
                       <a:r>
-                        <a:rPr lang="en-US" dirty="0"/>
+                        <a:rPr lang="en-US" sz="1400"/>
                         <a:t>negative group values</a:t>
                       </a:r>
                     </a:p>
                   </a:txBody>
-                  <a:tcPr/>
+                  <a:tcPr marL="69384" marR="69384" marT="34692" marB="34692"/>
                 </a:tc>
                 <a:tc>
                   <a:txBody>
@@ -4680,12 +4628,12 @@
                     <a:lstStyle/>
                     <a:p>
                       <a:r>
-                        <a:rPr lang="en-US" dirty="0"/>
+                        <a:rPr lang="en-US" sz="1400"/>
                         <a:t>P-value</a:t>
                       </a:r>
                     </a:p>
                   </a:txBody>
-                  <a:tcPr/>
+                  <a:tcPr marL="69384" marR="69384" marT="34692" marB="34692"/>
                 </a:tc>
                 <a:extLst>
                   <a:ext uri="{0D108BD9-81ED-4DB2-BD59-A6C34878D82A}">
@@ -4693,20 +4641,19 @@
                   </a:ext>
                 </a:extLst>
               </a:tr>
-              <a:tr h="370840">
+              <a:tr h="513444">
                 <a:tc>
                   <a:txBody>
                     <a:bodyPr/>
                     <a:lstStyle/>
                     <a:p>
                       <a:r>
-                        <a:rPr lang="en-US" dirty="0" err="1"/>
+                        <a:rPr lang="en-US" sz="1400"/>
                         <a:t>Bathing_season</a:t>
                       </a:r>
-                      <a:endParaRPr lang="en-US" dirty="0"/>
                     </a:p>
                   </a:txBody>
-                  <a:tcPr/>
+                  <a:tcPr marL="69384" marR="69384" marT="34692" marB="34692"/>
                 </a:tc>
                 <a:tc>
                   <a:txBody>
@@ -4714,12 +4661,12 @@
                     <a:lstStyle/>
                     <a:p>
                       <a:r>
-                        <a:rPr lang="en-US" dirty="0"/>
-                        <a:t>Std:0.978,mean:3.775,median:4</a:t>
+                        <a:rPr lang="en-US" sz="1400"/>
+                        <a:t>Std:36.46,mean:5.371,median:3.67</a:t>
                       </a:r>
                     </a:p>
                   </a:txBody>
-                  <a:tcPr/>
+                  <a:tcPr marL="69384" marR="69384" marT="34692" marB="34692"/>
                 </a:tc>
                 <a:tc>
                   <a:txBody>
@@ -4727,12 +4674,12 @@
                     <a:lstStyle/>
                     <a:p>
                       <a:r>
-                        <a:rPr lang="en-US" dirty="0"/>
-                        <a:t>Std:1.009,mean:3.810,median:4</a:t>
+                        <a:rPr lang="en-US" sz="1400"/>
+                        <a:t>Std:50482.51,mean:513.31,median:3.56</a:t>
                       </a:r>
                     </a:p>
                   </a:txBody>
-                  <a:tcPr/>
+                  <a:tcPr marL="69384" marR="69384" marT="34692" marB="34692"/>
                 </a:tc>
                 <a:tc>
                   <a:txBody>
@@ -4740,12 +4687,12 @@
                     <a:lstStyle/>
                     <a:p>
                       <a:r>
-                        <a:rPr lang="en-US" dirty="0"/>
-                        <a:t>0</a:t>
+                        <a:rPr lang="en-US" sz="1400"/>
+                        <a:t>0.003</a:t>
                       </a:r>
                     </a:p>
                   </a:txBody>
-                  <a:tcPr/>
+                  <a:tcPr marL="69384" marR="69384" marT="34692" marB="34692"/>
                 </a:tc>
                 <a:extLst>
                   <a:ext uri="{0D108BD9-81ED-4DB2-BD59-A6C34878D82A}">
@@ -4753,20 +4700,19 @@
                   </a:ext>
                 </a:extLst>
               </a:tr>
-              <a:tr h="370840">
+              <a:tr h="513444">
                 <a:tc>
                   <a:txBody>
                     <a:bodyPr/>
                     <a:lstStyle/>
                     <a:p>
                       <a:r>
-                        <a:rPr lang="en-US" dirty="0" err="1"/>
+                        <a:rPr lang="en-US" sz="1400"/>
                         <a:t>Summer_vacation</a:t>
                       </a:r>
-                      <a:endParaRPr lang="en-US" dirty="0"/>
                     </a:p>
                   </a:txBody>
-                  <a:tcPr/>
+                  <a:tcPr marL="69384" marR="69384" marT="34692" marB="34692"/>
                 </a:tc>
                 <a:tc>
                   <a:txBody>
@@ -4791,12 +4737,12 @@
                         <a:defRPr/>
                       </a:pPr>
                       <a:r>
-                        <a:rPr lang="en-US" dirty="0"/>
-                        <a:t>Std:0.974,mean:3.763,median:4</a:t>
+                        <a:rPr lang="en-US" sz="1400"/>
+                        <a:t>std=63.713, mean=6.031, median=3.7100</a:t>
                       </a:r>
                     </a:p>
                   </a:txBody>
-                  <a:tcPr/>
+                  <a:tcPr marL="69384" marR="69384" marT="34692" marB="34692"/>
                 </a:tc>
                 <a:tc>
                   <a:txBody>
@@ -4821,12 +4767,12 @@
                         <a:defRPr/>
                       </a:pPr>
                       <a:r>
-                        <a:rPr lang="en-US" dirty="0"/>
-                        <a:t>Std:0.994,mean:3.794,median:4</a:t>
+                        <a:rPr lang="en-US" sz="1400"/>
+                        <a:t>std=34823.307, mean=246.905, median=3.6000</a:t>
                       </a:r>
                     </a:p>
                   </a:txBody>
-                  <a:tcPr/>
+                  <a:tcPr marL="69384" marR="69384" marT="34692" marB="34692"/>
                 </a:tc>
                 <a:tc>
                   <a:txBody>
@@ -4834,12 +4780,12 @@
                     <a:lstStyle/>
                     <a:p>
                       <a:r>
-                        <a:rPr lang="en-US" dirty="0"/>
-                        <a:t>0.014</a:t>
+                        <a:rPr lang="en-US" sz="1400"/>
+                        <a:t>0.01080</a:t>
                       </a:r>
                     </a:p>
                   </a:txBody>
-                  <a:tcPr/>
+                  <a:tcPr marL="69384" marR="69384" marT="34692" marB="34692"/>
                 </a:tc>
                 <a:extLst>
                   <a:ext uri="{0D108BD9-81ED-4DB2-BD59-A6C34878D82A}">
@@ -4847,19 +4793,19 @@
                   </a:ext>
                 </a:extLst>
               </a:tr>
-              <a:tr h="370840">
+              <a:tr h="513444">
                 <a:tc>
                   <a:txBody>
                     <a:bodyPr/>
                     <a:lstStyle/>
                     <a:p>
                       <a:r>
-                        <a:rPr lang="en-US" dirty="0"/>
+                        <a:rPr lang="en-US" sz="1400"/>
                         <a:t>Nature</a:t>
                       </a:r>
                     </a:p>
                   </a:txBody>
-                  <a:tcPr/>
+                  <a:tcPr marL="69384" marR="69384" marT="34692" marB="34692"/>
                 </a:tc>
                 <a:tc>
                   <a:txBody>
@@ -4884,12 +4830,12 @@
                         <a:defRPr/>
                       </a:pPr>
                       <a:r>
-                        <a:rPr lang="en-US" dirty="0"/>
-                        <a:t>Std:0.987,mean:3.911,median:4</a:t>
+                        <a:rPr lang="en-US" sz="1400"/>
+                        <a:t>std=5.139, mean=4.544, median=3.0000</a:t>
                       </a:r>
                     </a:p>
                   </a:txBody>
-                  <a:tcPr/>
+                  <a:tcPr marL="69384" marR="69384" marT="34692" marB="34692"/>
                 </a:tc>
                 <a:tc>
                   <a:txBody>
@@ -4914,12 +4860,12 @@
                         <a:defRPr/>
                       </a:pPr>
                       <a:r>
-                        <a:rPr lang="en-US" dirty="0"/>
-                        <a:t>Std:0.989,mean:3.767,median:4</a:t>
+                        <a:rPr lang="en-US" sz="1400"/>
+                        <a:t>std=33781.953, mean=232.975, median=3.7500</a:t>
                       </a:r>
                     </a:p>
                   </a:txBody>
-                  <a:tcPr/>
+                  <a:tcPr marL="69384" marR="69384" marT="34692" marB="34692"/>
                 </a:tc>
                 <a:tc>
                   <a:txBody>
@@ -4927,12 +4873,12 @@
                     <a:lstStyle/>
                     <a:p>
                       <a:r>
-                        <a:rPr lang="en-US" dirty="0"/>
+                        <a:rPr lang="en-US" sz="1400"/>
                         <a:t>0</a:t>
                       </a:r>
                     </a:p>
                   </a:txBody>
-                  <a:tcPr/>
+                  <a:tcPr marL="69384" marR="69384" marT="34692" marB="34692"/>
                 </a:tc>
                 <a:extLst>
                   <a:ext uri="{0D108BD9-81ED-4DB2-BD59-A6C34878D82A}">
@@ -4940,19 +4886,19 @@
                   </a:ext>
                 </a:extLst>
               </a:tr>
-              <a:tr h="370840">
+              <a:tr h="513444">
                 <a:tc>
                   <a:txBody>
                     <a:bodyPr/>
                     <a:lstStyle/>
                     <a:p>
                       <a:r>
-                        <a:rPr lang="en-US" dirty="0"/>
+                        <a:rPr lang="en-US" sz="1400"/>
                         <a:t>river</a:t>
                       </a:r>
                     </a:p>
                   </a:txBody>
-                  <a:tcPr/>
+                  <a:tcPr marL="69384" marR="69384" marT="34692" marB="34692"/>
                 </a:tc>
                 <a:tc>
                   <a:txBody>
@@ -4977,12 +4923,12 @@
                         <a:defRPr/>
                       </a:pPr>
                       <a:r>
-                        <a:rPr lang="en-US" dirty="0"/>
-                        <a:t>Std:0.969,mean:3.618,median:4</a:t>
+                        <a:rPr lang="en-US" sz="1400"/>
+                        <a:t>std=5.251, mean=5.584, median=4.2500</a:t>
                       </a:r>
                     </a:p>
                   </a:txBody>
-                  <a:tcPr/>
+                  <a:tcPr marL="69384" marR="69384" marT="34692" marB="34692"/>
                 </a:tc>
                 <a:tc>
                   <a:txBody>
@@ -5007,12 +4953,12 @@
                         <a:defRPr/>
                       </a:pPr>
                       <a:r>
-                        <a:rPr lang="en-US" dirty="0"/>
-                        <a:t>Std:0.991,mean:3.833,median:4</a:t>
+                        <a:rPr lang="en-US" sz="1400"/>
+                        <a:t>std=35015.527, mean=249.688, median=3.4700</a:t>
                       </a:r>
                     </a:p>
                   </a:txBody>
-                  <a:tcPr/>
+                  <a:tcPr marL="69384" marR="69384" marT="34692" marB="34692"/>
                 </a:tc>
                 <a:tc>
                   <a:txBody>
@@ -5020,12 +4966,12 @@
                     <a:lstStyle/>
                     <a:p>
                       <a:r>
-                        <a:rPr lang="en-US" dirty="0"/>
+                        <a:rPr lang="en-US" sz="1400"/>
                         <a:t>0</a:t>
                       </a:r>
                     </a:p>
                   </a:txBody>
-                  <a:tcPr/>
+                  <a:tcPr marL="69384" marR="69384" marT="34692" marB="34692"/>
                 </a:tc>
                 <a:extLst>
                   <a:ext uri="{0D108BD9-81ED-4DB2-BD59-A6C34878D82A}">
@@ -5033,19 +4979,19 @@
                   </a:ext>
                 </a:extLst>
               </a:tr>
-              <a:tr h="370840">
+              <a:tr h="513444">
                 <a:tc>
                   <a:txBody>
                     <a:bodyPr/>
                     <a:lstStyle/>
                     <a:p>
                       <a:r>
-                        <a:rPr lang="en-US" dirty="0"/>
+                        <a:rPr lang="en-US" sz="1400"/>
                         <a:t>Military</a:t>
                       </a:r>
                     </a:p>
                   </a:txBody>
-                  <a:tcPr/>
+                  <a:tcPr marL="69384" marR="69384" marT="34692" marB="34692"/>
                 </a:tc>
                 <a:tc>
                   <a:txBody>
@@ -5070,12 +5016,12 @@
                         <a:defRPr/>
                       </a:pPr>
                       <a:r>
-                        <a:rPr lang="en-US" dirty="0"/>
-                        <a:t>Std:0.866,mean:4.097,median:4</a:t>
+                        <a:rPr lang="en-US" sz="1400"/>
+                        <a:t>std=3.028, mean=3.607, median=2.7500</a:t>
                       </a:r>
                     </a:p>
                   </a:txBody>
-                  <a:tcPr/>
+                  <a:tcPr marL="69384" marR="69384" marT="34692" marB="34692"/>
                 </a:tc>
                 <a:tc>
                   <a:txBody>
@@ -5100,12 +5046,12 @@
                         <a:defRPr/>
                       </a:pPr>
                       <a:r>
-                        <a:rPr lang="en-US" dirty="0"/>
-                        <a:t>Std:0.991,mean:3.785,median:4</a:t>
+                        <a:rPr lang="en-US" sz="1400"/>
+                        <a:t>std=31327.242, mean=200.994, median=3.6300</a:t>
                       </a:r>
                     </a:p>
                   </a:txBody>
-                  <a:tcPr/>
+                  <a:tcPr marL="69384" marR="69384" marT="34692" marB="34692"/>
                 </a:tc>
                 <a:tc>
                   <a:txBody>
@@ -5113,12 +5059,12 @@
                     <a:lstStyle/>
                     <a:p>
                       <a:r>
-                        <a:rPr lang="en-US" dirty="0"/>
+                        <a:rPr lang="en-US" sz="1400"/>
                         <a:t>0</a:t>
                       </a:r>
                     </a:p>
                   </a:txBody>
-                  <a:tcPr/>
+                  <a:tcPr marL="69384" marR="69384" marT="34692" marB="34692"/>
                 </a:tc>
                 <a:extLst>
                   <a:ext uri="{0D108BD9-81ED-4DB2-BD59-A6C34878D82A}">
@@ -5126,19 +5072,19 @@
                   </a:ext>
                 </a:extLst>
               </a:tr>
-              <a:tr h="370840">
+              <a:tr h="513444">
                 <a:tc>
                   <a:txBody>
                     <a:bodyPr/>
                     <a:lstStyle/>
                     <a:p>
                       <a:r>
-                        <a:rPr lang="en-US" dirty="0"/>
+                        <a:rPr lang="en-US" sz="1400"/>
                         <a:t>winter</a:t>
                       </a:r>
                     </a:p>
                   </a:txBody>
-                  <a:tcPr/>
+                  <a:tcPr marL="69384" marR="69384" marT="34692" marB="34692"/>
                 </a:tc>
                 <a:tc>
                   <a:txBody>
@@ -5163,12 +5109,12 @@
                         <a:defRPr/>
                       </a:pPr>
                       <a:r>
-                        <a:rPr lang="en-US" dirty="0"/>
-                        <a:t>Std:1.017,mean:3.771,median:4</a:t>
+                        <a:rPr lang="en-US" sz="1400"/>
+                        <a:t>std=65358.400, mean=857.135, median=3.7500</a:t>
                       </a:r>
                     </a:p>
                   </a:txBody>
-                  <a:tcPr/>
+                  <a:tcPr marL="69384" marR="69384" marT="34692" marB="34692"/>
                 </a:tc>
                 <a:tc>
                   <a:txBody>
@@ -5193,12 +5139,12 @@
                         <a:defRPr/>
                       </a:pPr>
                       <a:r>
-                        <a:rPr lang="en-US" dirty="0"/>
-                        <a:t>Std:0.982,mean:3.793,median:4</a:t>
+                        <a:rPr lang="en-US" sz="1400"/>
+                        <a:t>std=32.774, mean=5.265, median=3.6000</a:t>
                       </a:r>
                     </a:p>
                   </a:txBody>
-                  <a:tcPr/>
+                  <a:tcPr marL="69384" marR="69384" marT="34692" marB="34692"/>
                 </a:tc>
                 <a:tc>
                   <a:txBody>
@@ -5206,16 +5152,109 @@
                     <a:lstStyle/>
                     <a:p>
                       <a:r>
-                        <a:rPr lang="en-US" dirty="0"/>
-                        <a:t>0.204</a:t>
+                        <a:rPr lang="en-US" sz="1400"/>
+                        <a:t>0.13348</a:t>
                       </a:r>
                     </a:p>
                   </a:txBody>
-                  <a:tcPr/>
+                  <a:tcPr marL="69384" marR="69384" marT="34692" marB="34692"/>
                 </a:tc>
                 <a:extLst>
                   <a:ext uri="{0D108BD9-81ED-4DB2-BD59-A6C34878D82A}">
                     <a16:rowId xmlns:a16="http://schemas.microsoft.com/office/drawing/2014/main" val="427390498"/>
+                  </a:ext>
+                </a:extLst>
+              </a:tr>
+              <a:tr h="513444">
+                <a:tc>
+                  <a:txBody>
+                    <a:bodyPr/>
+                    <a:lstStyle/>
+                    <a:p>
+                      <a:r>
+                        <a:rPr lang="en-US" sz="1400"/>
+                        <a:t>Have_rained</a:t>
+                      </a:r>
+                    </a:p>
+                  </a:txBody>
+                  <a:tcPr marL="69384" marR="69384" marT="34692" marB="34692"/>
+                </a:tc>
+                <a:tc>
+                  <a:txBody>
+                    <a:bodyPr/>
+                    <a:lstStyle/>
+                    <a:p>
+                      <a:pPr marL="0" marR="0" lvl="0" indent="0" algn="l" defTabSz="914400" rtl="0" eaLnBrk="1" fontAlgn="auto" latinLnBrk="0" hangingPunct="1">
+                        <a:lnSpc>
+                          <a:spcPct val="100000"/>
+                        </a:lnSpc>
+                        <a:spcBef>
+                          <a:spcPts val="0"/>
+                        </a:spcBef>
+                        <a:spcAft>
+                          <a:spcPts val="0"/>
+                        </a:spcAft>
+                        <a:buClrTx/>
+                        <a:buSzTx/>
+                        <a:buFontTx/>
+                        <a:buNone/>
+                        <a:tabLst/>
+                        <a:defRPr/>
+                      </a:pPr>
+                      <a:r>
+                        <a:rPr lang="en-US" sz="1400"/>
+                        <a:t>std=57842.500, mean=672.459, median=3.7300</a:t>
+                      </a:r>
+                    </a:p>
+                  </a:txBody>
+                  <a:tcPr marL="69384" marR="69384" marT="34692" marB="34692"/>
+                </a:tc>
+                <a:tc>
+                  <a:txBody>
+                    <a:bodyPr/>
+                    <a:lstStyle/>
+                    <a:p>
+                      <a:pPr marL="0" marR="0" lvl="0" indent="0" algn="l" defTabSz="914400" rtl="0" eaLnBrk="1" fontAlgn="auto" latinLnBrk="0" hangingPunct="1">
+                        <a:lnSpc>
+                          <a:spcPct val="100000"/>
+                        </a:lnSpc>
+                        <a:spcBef>
+                          <a:spcPts val="0"/>
+                        </a:spcBef>
+                        <a:spcAft>
+                          <a:spcPts val="0"/>
+                        </a:spcAft>
+                        <a:buClrTx/>
+                        <a:buSzTx/>
+                        <a:buFontTx/>
+                        <a:buNone/>
+                        <a:tabLst/>
+                        <a:defRPr/>
+                      </a:pPr>
+                      <a:r>
+                        <a:rPr lang="en-US" sz="1400"/>
+                        <a:t>std=34.166, mean=5.273, median=3.5900</a:t>
+                      </a:r>
+                    </a:p>
+                  </a:txBody>
+                  <a:tcPr marL="69384" marR="69384" marT="34692" marB="34692"/>
+                </a:tc>
+                <a:tc>
+                  <a:txBody>
+                    <a:bodyPr/>
+                    <a:lstStyle/>
+                    <a:p>
+                      <a:r>
+                        <a:rPr lang="en-US" sz="1400"/>
+                        <a:t>0.00550</a:t>
+                      </a:r>
+                    </a:p>
+                  </a:txBody>
+                  <a:tcPr marL="69384" marR="69384" marT="34692" marB="34692"/>
+                </a:tc>
+                <a:extLst>
+                  <a:ext uri="{0D108BD9-81ED-4DB2-BD59-A6C34878D82A}">
+                    <a16:rowId xmlns:a16="http://schemas.microsoft.com/office/drawing/2014/main" val="2041575694"/>
                   </a:ext>
                 </a:extLst>
               </a:tr>
@@ -5536,7 +5575,7 @@
                 <a:effectLst/>
                 <a:latin typeface="Consolas" panose="020B0609020204030204" pitchFamily="49" charset="0"/>
               </a:rPr>
-              <a:t>North: std=0.997, mean=3.675, median=4.0000</a:t>
+              <a:t>North: std=46754.653, mean=441.484, median=3.9100</a:t>
             </a:r>
           </a:p>
           <a:p>
@@ -5545,7 +5584,7 @@
                 <a:effectLst/>
                 <a:latin typeface="Consolas" panose="020B0609020204030204" pitchFamily="49" charset="0"/>
               </a:rPr>
-              <a:t>Center: std=0.938, mean=3.918, median=4.0000 </a:t>
+              <a:t>Center: std=4.424, mean=4.348, median=3.3100</a:t>
             </a:r>
           </a:p>
           <a:p>
@@ -5554,7 +5593,7 @@
                 <a:effectLst/>
                 <a:latin typeface="Consolas" panose="020B0609020204030204" pitchFamily="49" charset="0"/>
               </a:rPr>
-              <a:t>Eilat: std=0.934, mean=4.257, median=4.0000 </a:t>
+              <a:t>Eilat: std=5.336, mean=3.444, median=2.0000</a:t>
             </a:r>
           </a:p>
           <a:p>
@@ -5563,7 +5602,7 @@
                 <a:effectLst/>
                 <a:latin typeface="Consolas" panose="020B0609020204030204" pitchFamily="49" charset="0"/>
               </a:rPr>
-              <a:t>South: std=0.998, mean=3.690, median=4.0000</a:t>
+              <a:t>South: std=63.881, mean=6.666, median=4.0900</a:t>
             </a:r>
           </a:p>
           <a:p>
@@ -5585,335 +5624,6 @@
     <p:extLst>
       <p:ext uri="{BB962C8B-B14F-4D97-AF65-F5344CB8AC3E}">
         <p14:creationId xmlns:p14="http://schemas.microsoft.com/office/powerpoint/2010/main" val="3472700451"/>
-      </p:ext>
-    </p:extLst>
-  </p:cSld>
-  <p:clrMapOvr>
-    <a:masterClrMapping/>
-  </p:clrMapOvr>
-</p:sld>
-</file>
-
-<file path=ppt/slides/slide6.xml><?xml version="1.0" encoding="utf-8"?>
-<p:sld xmlns:a="http://schemas.openxmlformats.org/drawingml/2006/main" xmlns:r="http://schemas.openxmlformats.org/officeDocument/2006/relationships" xmlns:p="http://schemas.openxmlformats.org/presentationml/2006/main">
-  <p:cSld>
-    <p:bg>
-      <p:bgPr>
-        <a:solidFill>
-          <a:schemeClr val="bg1"/>
-        </a:solidFill>
-        <a:effectLst/>
-      </p:bgPr>
-    </p:bg>
-    <p:spTree>
-      <p:nvGrpSpPr>
-        <p:cNvPr id="1" name=""/>
-        <p:cNvGrpSpPr/>
-        <p:nvPr/>
-      </p:nvGrpSpPr>
-      <p:grpSpPr>
-        <a:xfrm>
-          <a:off x="0" y="0"/>
-          <a:ext cx="0" cy="0"/>
-          <a:chOff x="0" y="0"/>
-          <a:chExt cx="0" cy="0"/>
-        </a:xfrm>
-      </p:grpSpPr>
-      <p:sp>
-        <p:nvSpPr>
-          <p:cNvPr id="8" name="Rectangle 7">
-            <a:extLst>
-              <a:ext uri="{FF2B5EF4-FFF2-40B4-BE49-F238E27FC236}">
-                <a16:creationId xmlns:a16="http://schemas.microsoft.com/office/drawing/2014/main" id="{70DFC902-7D23-471A-B557-B6B6917D7A0D}"/>
-              </a:ext>
-              <a:ext uri="{C183D7F6-B498-43B3-948B-1728B52AA6E4}">
-                <adec:decorative xmlns:adec="http://schemas.microsoft.com/office/drawing/2017/decorative" val="1"/>
-              </a:ext>
-            </a:extLst>
-          </p:cNvPr>
-          <p:cNvSpPr>
-            <a:spLocks noGrp="1" noRot="1" noChangeAspect="1" noMove="1" noResize="1" noEditPoints="1" noAdjustHandles="1" noChangeArrowheads="1" noChangeShapeType="1" noTextEdit="1"/>
-          </p:cNvSpPr>
-          <p:nvPr>
-            <p:extLst>
-              <p:ext uri="{386F3935-93C4-4BCD-93E2-E3B085C9AB24}">
-                <p16:designElem xmlns:p16="http://schemas.microsoft.com/office/powerpoint/2015/main" val="1"/>
-              </p:ext>
-            </p:extLst>
-          </p:nvPr>
-        </p:nvSpPr>
-        <p:spPr>
-          <a:xfrm>
-            <a:off x="10" y="-5705"/>
-            <a:ext cx="12191990" cy="1694346"/>
-          </a:xfrm>
-          <a:prstGeom prst="rect">
-            <a:avLst/>
-          </a:prstGeom>
-          <a:solidFill>
-            <a:schemeClr val="tx1">
-              <a:lumMod val="85000"/>
-              <a:lumOff val="15000"/>
-            </a:schemeClr>
-          </a:solidFill>
-          <a:ln>
-            <a:noFill/>
-          </a:ln>
-        </p:spPr>
-        <p:style>
-          <a:lnRef idx="2">
-            <a:schemeClr val="accent1">
-              <a:shade val="50000"/>
-            </a:schemeClr>
-          </a:lnRef>
-          <a:fillRef idx="1">
-            <a:schemeClr val="accent1"/>
-          </a:fillRef>
-          <a:effectRef idx="0">
-            <a:schemeClr val="accent1"/>
-          </a:effectRef>
-          <a:fontRef idx="minor">
-            <a:schemeClr val="lt1"/>
-          </a:fontRef>
-        </p:style>
-        <p:txBody>
-          <a:bodyPr rtlCol="0" anchor="ctr"/>
-          <a:lstStyle/>
-          <a:p>
-            <a:pPr algn="ctr"/>
-            <a:endParaRPr lang="en-US"/>
-          </a:p>
-        </p:txBody>
-      </p:sp>
-      <p:sp>
-        <p:nvSpPr>
-          <p:cNvPr id="2" name="Title 1">
-            <a:extLst>
-              <a:ext uri="{FF2B5EF4-FFF2-40B4-BE49-F238E27FC236}">
-                <a16:creationId xmlns:a16="http://schemas.microsoft.com/office/drawing/2014/main" id="{B0C667D0-989F-639B-4D5D-4B40E50A1C43}"/>
-              </a:ext>
-            </a:extLst>
-          </p:cNvPr>
-          <p:cNvSpPr>
-            <a:spLocks noGrp="1"/>
-          </p:cNvSpPr>
-          <p:nvPr>
-            <p:ph type="title"/>
-          </p:nvPr>
-        </p:nvSpPr>
-        <p:spPr>
-          <a:xfrm>
-            <a:off x="1156851" y="637762"/>
-            <a:ext cx="9888496" cy="900131"/>
-          </a:xfrm>
-        </p:spPr>
-        <p:txBody>
-          <a:bodyPr anchor="t">
-            <a:normAutofit/>
-          </a:bodyPr>
-          <a:lstStyle/>
-          <a:p>
-            <a:r>
-              <a:rPr lang="en-US" sz="4000" dirty="0">
-                <a:solidFill>
-                  <a:schemeClr val="bg1"/>
-                </a:solidFill>
-              </a:rPr>
-              <a:t>Conclusions</a:t>
-            </a:r>
-          </a:p>
-        </p:txBody>
-      </p:sp>
-      <p:sp>
-        <p:nvSpPr>
-          <p:cNvPr id="10" name="Rectangle 9">
-            <a:extLst>
-              <a:ext uri="{FF2B5EF4-FFF2-40B4-BE49-F238E27FC236}">
-                <a16:creationId xmlns:a16="http://schemas.microsoft.com/office/drawing/2014/main" id="{A55D5633-D557-4DCA-982C-FF36EB7A1C00}"/>
-              </a:ext>
-              <a:ext uri="{C183D7F6-B498-43B3-948B-1728B52AA6E4}">
-                <adec:decorative xmlns:adec="http://schemas.microsoft.com/office/drawing/2017/decorative" val="1"/>
-              </a:ext>
-            </a:extLst>
-          </p:cNvPr>
-          <p:cNvSpPr>
-            <a:spLocks noGrp="1" noRot="1" noChangeAspect="1" noMove="1" noResize="1" noEditPoints="1" noAdjustHandles="1" noChangeArrowheads="1" noChangeShapeType="1" noTextEdit="1"/>
-          </p:cNvSpPr>
-          <p:nvPr>
-            <p:extLst>
-              <p:ext uri="{386F3935-93C4-4BCD-93E2-E3B085C9AB24}">
-                <p16:designElem xmlns:p16="http://schemas.microsoft.com/office/powerpoint/2015/main" val="1"/>
-              </p:ext>
-            </p:extLst>
-          </p:nvPr>
-        </p:nvSpPr>
-        <p:spPr>
-          <a:xfrm>
-            <a:off x="0" y="1688641"/>
-            <a:ext cx="12191990" cy="5169359"/>
-          </a:xfrm>
-          <a:prstGeom prst="rect">
-            <a:avLst/>
-          </a:prstGeom>
-          <a:solidFill>
-            <a:schemeClr val="bg1">
-              <a:lumMod val="95000"/>
-            </a:schemeClr>
-          </a:solidFill>
-          <a:ln>
-            <a:noFill/>
-          </a:ln>
-        </p:spPr>
-        <p:style>
-          <a:lnRef idx="2">
-            <a:schemeClr val="accent1">
-              <a:shade val="50000"/>
-            </a:schemeClr>
-          </a:lnRef>
-          <a:fillRef idx="1">
-            <a:schemeClr val="accent1"/>
-          </a:fillRef>
-          <a:effectRef idx="0">
-            <a:schemeClr val="accent1"/>
-          </a:effectRef>
-          <a:fontRef idx="minor">
-            <a:schemeClr val="lt1"/>
-          </a:fontRef>
-        </p:style>
-        <p:txBody>
-          <a:bodyPr rtlCol="0" anchor="ctr"/>
-          <a:lstStyle/>
-          <a:p>
-            <a:pPr algn="ctr"/>
-            <a:endParaRPr lang="en-US"/>
-          </a:p>
-        </p:txBody>
-      </p:sp>
-      <p:sp>
-        <p:nvSpPr>
-          <p:cNvPr id="12" name="Rectangle 11">
-            <a:extLst>
-              <a:ext uri="{FF2B5EF4-FFF2-40B4-BE49-F238E27FC236}">
-                <a16:creationId xmlns:a16="http://schemas.microsoft.com/office/drawing/2014/main" id="{450D3AD2-FA80-415F-A9CE-54D884561CD7}"/>
-              </a:ext>
-              <a:ext uri="{C183D7F6-B498-43B3-948B-1728B52AA6E4}">
-                <adec:decorative xmlns:adec="http://schemas.microsoft.com/office/drawing/2017/decorative" val="1"/>
-              </a:ext>
-            </a:extLst>
-          </p:cNvPr>
-          <p:cNvSpPr>
-            <a:spLocks noGrp="1" noRot="1" noChangeAspect="1" noMove="1" noResize="1" noEditPoints="1" noAdjustHandles="1" noChangeArrowheads="1" noChangeShapeType="1" noTextEdit="1"/>
-          </p:cNvSpPr>
-          <p:nvPr>
-            <p:extLst>
-              <p:ext uri="{386F3935-93C4-4BCD-93E2-E3B085C9AB24}">
-                <p16:designElem xmlns:p16="http://schemas.microsoft.com/office/powerpoint/2015/main" val="1"/>
-              </p:ext>
-            </p:extLst>
-          </p:nvPr>
-        </p:nvSpPr>
-        <p:spPr>
-          <a:xfrm>
-            <a:off x="1156851" y="2010758"/>
-            <a:ext cx="457190" cy="45719"/>
-          </a:xfrm>
-          <a:prstGeom prst="rect">
-            <a:avLst/>
-          </a:prstGeom>
-          <a:solidFill>
-            <a:schemeClr val="tx1"/>
-          </a:solidFill>
-          <a:ln>
-            <a:noFill/>
-          </a:ln>
-        </p:spPr>
-        <p:style>
-          <a:lnRef idx="2">
-            <a:schemeClr val="accent1">
-              <a:shade val="50000"/>
-            </a:schemeClr>
-          </a:lnRef>
-          <a:fillRef idx="1">
-            <a:schemeClr val="accent1"/>
-          </a:fillRef>
-          <a:effectRef idx="0">
-            <a:schemeClr val="accent1"/>
-          </a:effectRef>
-          <a:fontRef idx="minor">
-            <a:schemeClr val="lt1"/>
-          </a:fontRef>
-        </p:style>
-        <p:txBody>
-          <a:bodyPr rtlCol="0" anchor="ctr"/>
-          <a:lstStyle/>
-          <a:p>
-            <a:pPr algn="ctr"/>
-            <a:endParaRPr lang="en-US"/>
-          </a:p>
-        </p:txBody>
-      </p:sp>
-      <p:sp>
-        <p:nvSpPr>
-          <p:cNvPr id="13" name="TextBox 12">
-            <a:extLst>
-              <a:ext uri="{FF2B5EF4-FFF2-40B4-BE49-F238E27FC236}">
-                <a16:creationId xmlns:a16="http://schemas.microsoft.com/office/drawing/2014/main" id="{893E7E10-04EB-9572-054C-5191252766FC}"/>
-              </a:ext>
-            </a:extLst>
-          </p:cNvPr>
-          <p:cNvSpPr txBox="1"/>
-          <p:nvPr/>
-        </p:nvSpPr>
-        <p:spPr>
-          <a:xfrm>
-            <a:off x="752168" y="2147442"/>
-            <a:ext cx="9040761" cy="3046988"/>
-          </a:xfrm>
-          <a:prstGeom prst="rect">
-            <a:avLst/>
-          </a:prstGeom>
-          <a:noFill/>
-        </p:spPr>
-        <p:txBody>
-          <a:bodyPr wrap="square" rtlCol="0">
-            <a:spAutoFit/>
-          </a:bodyPr>
-          <a:lstStyle/>
-          <a:p>
-            <a:pPr marL="342900" indent="-342900">
-              <a:buFont typeface="Arial" panose="020B0604020202020204" pitchFamily="34" charset="0"/>
-              <a:buChar char="•"/>
-            </a:pPr>
-            <a:r>
-              <a:rPr lang="en-US" sz="2400" dirty="0">
-                <a:latin typeface="Consolas" panose="020B0609020204030204" pitchFamily="49" charset="0"/>
-              </a:rPr>
-              <a:t>Features like bathing season, nature and military among others affect the target, expect for the ‘rain’ feature which didn’t show statistical significance.</a:t>
-            </a:r>
-          </a:p>
-          <a:p>
-            <a:endParaRPr lang="en-US" sz="2400" dirty="0">
-              <a:latin typeface="Consolas" panose="020B0609020204030204" pitchFamily="49" charset="0"/>
-            </a:endParaRPr>
-          </a:p>
-          <a:p>
-            <a:pPr marL="342900" indent="-342900">
-              <a:buFont typeface="Arial" panose="020B0604020202020204" pitchFamily="34" charset="0"/>
-              <a:buChar char="•"/>
-            </a:pPr>
-            <a:r>
-              <a:rPr lang="en-US" sz="2400" dirty="0">
-                <a:latin typeface="Consolas" panose="020B0609020204030204" pitchFamily="49" charset="0"/>
-              </a:rPr>
-              <a:t>There is a difference in beaches cleanliness between coasts in different areas, expect the Northern and Southern coasts.</a:t>
-            </a:r>
-          </a:p>
-        </p:txBody>
-      </p:sp>
-    </p:spTree>
-    <p:extLst>
-      <p:ext uri="{BB962C8B-B14F-4D97-AF65-F5344CB8AC3E}">
-        <p14:creationId xmlns:p14="http://schemas.microsoft.com/office/powerpoint/2010/main" val="157750508"/>
       </p:ext>
     </p:extLst>
   </p:cSld>
